--- a/AI_BT_Tree.pptx
+++ b/AI_BT_Tree.pptx
@@ -3335,7 +3335,7 @@
         </p:nvSpPr>
         <p:spPr>
           <a:xfrm>
-            <a:off x="5022228" y="1504950"/>
+            <a:off x="5701678" y="1462863"/>
             <a:ext cx="1073772" cy="419544"/>
           </a:xfrm>
           <a:prstGeom prst="rect">
@@ -3372,15 +3372,7 @@
             <a:pPr algn="ctr"/>
             <a:r>
               <a:rPr lang="ko-KR" altLang="en-US" sz="1200" dirty="0"/>
-              <a:t>이동 </a:t>
-            </a:r>
-            <a:r>
-              <a:rPr lang="en-US" altLang="ko-KR" sz="1200" dirty="0"/>
-              <a:t>or </a:t>
-            </a:r>
-            <a:r>
-              <a:rPr lang="ko-KR" altLang="en-US" sz="1200" dirty="0"/>
-              <a:t>공방</a:t>
+              <a:t>행동</a:t>
             </a:r>
           </a:p>
         </p:txBody>
@@ -3399,7 +3391,7 @@
         </p:nvSpPr>
         <p:spPr>
           <a:xfrm>
-            <a:off x="3035496" y="3002640"/>
+            <a:off x="2927546" y="2983590"/>
             <a:ext cx="1246433" cy="579820"/>
           </a:xfrm>
           <a:prstGeom prst="rect">
@@ -3471,7 +3463,7 @@
         </p:nvSpPr>
         <p:spPr>
           <a:xfrm>
-            <a:off x="2105254" y="4045369"/>
+            <a:off x="1997304" y="4026319"/>
             <a:ext cx="930242" cy="371814"/>
           </a:xfrm>
           <a:prstGeom prst="rect">
@@ -3528,7 +3520,7 @@
         </p:nvSpPr>
         <p:spPr>
           <a:xfrm>
-            <a:off x="2146496" y="2306464"/>
+            <a:off x="2038546" y="2287414"/>
             <a:ext cx="889000" cy="539750"/>
           </a:xfrm>
           <a:prstGeom prst="rect">
@@ -3585,7 +3577,7 @@
         </p:nvSpPr>
         <p:spPr>
           <a:xfrm>
-            <a:off x="810967" y="3002640"/>
+            <a:off x="703017" y="2983590"/>
             <a:ext cx="1382336" cy="579819"/>
           </a:xfrm>
           <a:prstGeom prst="flowChartDecision">
@@ -3639,7 +3631,7 @@
         </p:nvSpPr>
         <p:spPr>
           <a:xfrm>
-            <a:off x="692346" y="4880092"/>
+            <a:off x="584396" y="4861042"/>
             <a:ext cx="1739900" cy="659956"/>
           </a:xfrm>
           <a:prstGeom prst="flowChartDecision">
@@ -3693,7 +3685,7 @@
         </p:nvSpPr>
         <p:spPr>
           <a:xfrm>
-            <a:off x="2760547" y="5024163"/>
+            <a:off x="2652597" y="5005113"/>
             <a:ext cx="898165" cy="371814"/>
           </a:xfrm>
           <a:prstGeom prst="rect">
@@ -3750,7 +3742,7 @@
         </p:nvSpPr>
         <p:spPr>
           <a:xfrm>
-            <a:off x="3991171" y="3989047"/>
+            <a:off x="3883221" y="3969997"/>
             <a:ext cx="1031057" cy="419544"/>
           </a:xfrm>
           <a:prstGeom prst="rect">
@@ -3807,7 +3799,7 @@
         </p:nvSpPr>
         <p:spPr>
           <a:xfrm>
-            <a:off x="8542712" y="2292352"/>
+            <a:off x="8434762" y="2273302"/>
             <a:ext cx="916495" cy="487896"/>
           </a:xfrm>
           <a:prstGeom prst="rect">
@@ -3864,7 +3856,7 @@
         </p:nvSpPr>
         <p:spPr>
           <a:xfrm>
-            <a:off x="10012394" y="3106524"/>
+            <a:off x="9904444" y="3087474"/>
             <a:ext cx="1246433" cy="487896"/>
           </a:xfrm>
           <a:prstGeom prst="rect">
@@ -3933,7 +3925,7 @@
         </p:nvSpPr>
         <p:spPr>
           <a:xfrm>
-            <a:off x="6560012" y="3048601"/>
+            <a:off x="6452062" y="3029551"/>
             <a:ext cx="916495" cy="487896"/>
           </a:xfrm>
           <a:prstGeom prst="rect">
@@ -3990,7 +3982,7 @@
         </p:nvSpPr>
         <p:spPr>
           <a:xfrm>
-            <a:off x="5358221" y="3941366"/>
+            <a:off x="5250271" y="3922316"/>
             <a:ext cx="1475557" cy="579819"/>
           </a:xfrm>
           <a:prstGeom prst="flowChartDecision">
@@ -4044,7 +4036,7 @@
         </p:nvSpPr>
         <p:spPr>
           <a:xfrm>
-            <a:off x="7238999" y="3948536"/>
+            <a:off x="7131049" y="3929486"/>
             <a:ext cx="1246433" cy="626959"/>
           </a:xfrm>
           <a:prstGeom prst="rect">
@@ -4116,7 +4108,7 @@
         </p:nvSpPr>
         <p:spPr>
           <a:xfrm>
-            <a:off x="5358221" y="5878101"/>
+            <a:off x="5250271" y="5859051"/>
             <a:ext cx="1735096" cy="659956"/>
           </a:xfrm>
           <a:prstGeom prst="flowChartDecision">
@@ -4170,7 +4162,7 @@
         </p:nvSpPr>
         <p:spPr>
           <a:xfrm>
-            <a:off x="7093317" y="6066837"/>
+            <a:off x="6985367" y="6047787"/>
             <a:ext cx="1033348" cy="371814"/>
           </a:xfrm>
           <a:prstGeom prst="rect">
@@ -4227,7 +4219,7 @@
         </p:nvSpPr>
         <p:spPr>
           <a:xfrm>
-            <a:off x="6556023" y="5111394"/>
+            <a:off x="6448073" y="5092344"/>
             <a:ext cx="1074589" cy="371814"/>
           </a:xfrm>
           <a:prstGeom prst="rect">
@@ -4284,7 +4276,7 @@
         </p:nvSpPr>
         <p:spPr>
           <a:xfrm>
-            <a:off x="7969902" y="5120504"/>
+            <a:off x="7861952" y="5101454"/>
             <a:ext cx="1031057" cy="419544"/>
           </a:xfrm>
           <a:prstGeom prst="rect">
@@ -4341,7 +4333,7 @@
         </p:nvSpPr>
         <p:spPr>
           <a:xfrm>
-            <a:off x="9357185" y="3920695"/>
+            <a:off x="9249235" y="3901645"/>
             <a:ext cx="916495" cy="487896"/>
           </a:xfrm>
           <a:prstGeom prst="rect">
@@ -4398,7 +4390,7 @@
         </p:nvSpPr>
         <p:spPr>
           <a:xfrm>
-            <a:off x="8487656" y="4524492"/>
+            <a:off x="8379706" y="4505442"/>
             <a:ext cx="1417426" cy="659956"/>
           </a:xfrm>
           <a:prstGeom prst="flowChartDecision">
@@ -4456,7 +4448,7 @@
         </p:nvSpPr>
         <p:spPr>
           <a:xfrm>
-            <a:off x="10012394" y="4644698"/>
+            <a:off x="9904444" y="4625648"/>
             <a:ext cx="1031057" cy="419544"/>
           </a:xfrm>
           <a:prstGeom prst="rect">
@@ -4517,7 +4509,7 @@
         </p:nvSpPr>
         <p:spPr>
           <a:xfrm>
-            <a:off x="10976989" y="3954871"/>
+            <a:off x="10869039" y="3935821"/>
             <a:ext cx="1031057" cy="419544"/>
           </a:xfrm>
           <a:prstGeom prst="rect">
@@ -4560,535 +4552,26 @@
           </a:p>
         </p:txBody>
       </p:sp>
-      <p:sp>
-        <p:nvSpPr>
-          <p:cNvPr id="27" name="직사각형 26">
-            <a:extLst>
-              <a:ext uri="{FF2B5EF4-FFF2-40B4-BE49-F238E27FC236}">
-                <a16:creationId xmlns:a16="http://schemas.microsoft.com/office/drawing/2014/main" id="{0E91EAB4-5095-EDE2-C4FE-D2511D14B4F5}"/>
-              </a:ext>
-            </a:extLst>
-          </p:cNvPr>
-          <p:cNvSpPr/>
-          <p:nvPr/>
-        </p:nvSpPr>
-        <p:spPr>
-          <a:xfrm>
-            <a:off x="5022227" y="197176"/>
-            <a:ext cx="1073772" cy="419544"/>
-          </a:xfrm>
-          <a:prstGeom prst="rect">
-            <a:avLst/>
-          </a:prstGeom>
-        </p:spPr>
-        <p:style>
-          <a:lnRef idx="2">
-            <a:schemeClr val="accent1">
-              <a:shade val="15000"/>
-            </a:schemeClr>
-          </a:lnRef>
-          <a:fillRef idx="1">
-            <a:schemeClr val="accent1"/>
-          </a:fillRef>
-          <a:effectRef idx="0">
-            <a:schemeClr val="accent1"/>
-          </a:effectRef>
-          <a:fontRef idx="minor">
-            <a:schemeClr val="lt1"/>
-          </a:fontRef>
-        </p:style>
-        <p:txBody>
-          <a:bodyPr rtlCol="0" anchor="ctr"/>
-          <a:lstStyle/>
-          <a:p>
-            <a:pPr algn="ctr"/>
-            <a:r>
-              <a:rPr lang="en-US" altLang="ko-KR" sz="1200" dirty="0"/>
-              <a:t>Selector</a:t>
-            </a:r>
-          </a:p>
-          <a:p>
-            <a:pPr algn="ctr"/>
-            <a:r>
-              <a:rPr lang="ko-KR" altLang="en-US" sz="1200" dirty="0"/>
-              <a:t>키</a:t>
-            </a:r>
-            <a:r>
-              <a:rPr lang="en-US" altLang="ko-KR" sz="1200" dirty="0"/>
-              <a:t>Up, Down</a:t>
-            </a:r>
-          </a:p>
-        </p:txBody>
-      </p:sp>
-      <p:sp>
-        <p:nvSpPr>
-          <p:cNvPr id="28" name="순서도: 판단 27">
-            <a:extLst>
-              <a:ext uri="{FF2B5EF4-FFF2-40B4-BE49-F238E27FC236}">
-                <a16:creationId xmlns:a16="http://schemas.microsoft.com/office/drawing/2014/main" id="{3EF506A1-99B0-61F0-D0A5-232CEC590A79}"/>
-              </a:ext>
-            </a:extLst>
-          </p:cNvPr>
-          <p:cNvSpPr/>
-          <p:nvPr/>
-        </p:nvSpPr>
-        <p:spPr>
-          <a:xfrm>
-            <a:off x="281953" y="1548581"/>
-            <a:ext cx="1220182" cy="579819"/>
-          </a:xfrm>
-          <a:prstGeom prst="flowChartDecision">
-            <a:avLst/>
-          </a:prstGeom>
-        </p:spPr>
-        <p:style>
-          <a:lnRef idx="2">
-            <a:schemeClr val="accent1">
-              <a:shade val="15000"/>
-            </a:schemeClr>
-          </a:lnRef>
-          <a:fillRef idx="1">
-            <a:schemeClr val="accent1"/>
-          </a:fillRef>
-          <a:effectRef idx="0">
-            <a:schemeClr val="accent1"/>
-          </a:effectRef>
-          <a:fontRef idx="minor">
-            <a:schemeClr val="lt1"/>
-          </a:fontRef>
-        </p:style>
-        <p:txBody>
-          <a:bodyPr rtlCol="0" anchor="ctr"/>
-          <a:lstStyle/>
-          <a:p>
-            <a:pPr algn="ctr"/>
-            <a:r>
-              <a:rPr lang="ko-KR" altLang="en-US" sz="1000" dirty="0"/>
-              <a:t>이동중인가</a:t>
-            </a:r>
-            <a:r>
-              <a:rPr lang="en-US" altLang="ko-KR" sz="1000" dirty="0"/>
-              <a:t>?</a:t>
-            </a:r>
-            <a:endParaRPr lang="ko-KR" altLang="en-US" sz="1000" dirty="0"/>
-          </a:p>
-        </p:txBody>
-      </p:sp>
-      <p:sp>
-        <p:nvSpPr>
-          <p:cNvPr id="29" name="직사각형 28">
-            <a:extLst>
-              <a:ext uri="{FF2B5EF4-FFF2-40B4-BE49-F238E27FC236}">
-                <a16:creationId xmlns:a16="http://schemas.microsoft.com/office/drawing/2014/main" id="{3C2D7F51-45CF-1A03-93F6-FC6D80BC80CF}"/>
-              </a:ext>
-            </a:extLst>
-          </p:cNvPr>
-          <p:cNvSpPr/>
-          <p:nvPr/>
-        </p:nvSpPr>
-        <p:spPr>
-          <a:xfrm>
-            <a:off x="1987746" y="714413"/>
-            <a:ext cx="889000" cy="539750"/>
-          </a:xfrm>
-          <a:prstGeom prst="rect">
-            <a:avLst/>
-          </a:prstGeom>
-        </p:spPr>
-        <p:style>
-          <a:lnRef idx="2">
-            <a:schemeClr val="accent1">
-              <a:shade val="15000"/>
-            </a:schemeClr>
-          </a:lnRef>
-          <a:fillRef idx="1">
-            <a:schemeClr val="accent1"/>
-          </a:fillRef>
-          <a:effectRef idx="0">
-            <a:schemeClr val="accent1"/>
-          </a:effectRef>
-          <a:fontRef idx="minor">
-            <a:schemeClr val="lt1"/>
-          </a:fontRef>
-        </p:style>
-        <p:txBody>
-          <a:bodyPr rtlCol="0" anchor="ctr"/>
-          <a:lstStyle/>
-          <a:p>
-            <a:pPr algn="ctr"/>
-            <a:r>
-              <a:rPr lang="en-US" altLang="ko-KR" sz="1200" dirty="0"/>
-              <a:t>Sequence</a:t>
-            </a:r>
-          </a:p>
-          <a:p>
-            <a:pPr algn="ctr"/>
-            <a:r>
-              <a:rPr lang="ko-KR" altLang="en-US" sz="1200" dirty="0"/>
-              <a:t>키 </a:t>
-            </a:r>
-            <a:r>
-              <a:rPr lang="en-US" altLang="ko-KR" sz="1200" dirty="0"/>
-              <a:t>Up</a:t>
-            </a:r>
-          </a:p>
-        </p:txBody>
-      </p:sp>
-      <p:sp>
-        <p:nvSpPr>
-          <p:cNvPr id="30" name="순서도: 판단 29">
-            <a:extLst>
-              <a:ext uri="{FF2B5EF4-FFF2-40B4-BE49-F238E27FC236}">
-                <a16:creationId xmlns:a16="http://schemas.microsoft.com/office/drawing/2014/main" id="{A0D15883-8B7D-2090-C3EA-22A9ECB6A9CC}"/>
-              </a:ext>
-            </a:extLst>
-          </p:cNvPr>
-          <p:cNvSpPr/>
-          <p:nvPr/>
-        </p:nvSpPr>
-        <p:spPr>
-          <a:xfrm>
-            <a:off x="1653160" y="1548582"/>
-            <a:ext cx="1382336" cy="579819"/>
-          </a:xfrm>
-          <a:prstGeom prst="flowChartDecision">
-            <a:avLst/>
-          </a:prstGeom>
-        </p:spPr>
-        <p:style>
-          <a:lnRef idx="2">
-            <a:schemeClr val="accent1">
-              <a:shade val="15000"/>
-            </a:schemeClr>
-          </a:lnRef>
-          <a:fillRef idx="1">
-            <a:schemeClr val="accent1"/>
-          </a:fillRef>
-          <a:effectRef idx="0">
-            <a:schemeClr val="accent1"/>
-          </a:effectRef>
-          <a:fontRef idx="minor">
-            <a:schemeClr val="lt1"/>
-          </a:fontRef>
-        </p:style>
-        <p:txBody>
-          <a:bodyPr rtlCol="0" anchor="ctr"/>
-          <a:lstStyle/>
-          <a:p>
-            <a:pPr algn="ctr"/>
-            <a:r>
-              <a:rPr lang="ko-KR" altLang="en-US" sz="1000" dirty="0"/>
-              <a:t>사정거리 밖에 있는가</a:t>
-            </a:r>
-            <a:r>
-              <a:rPr lang="en-US" altLang="ko-KR" sz="1000" dirty="0"/>
-              <a:t>?</a:t>
-            </a:r>
-            <a:endParaRPr lang="ko-KR" altLang="en-US" sz="1000" dirty="0"/>
-          </a:p>
-        </p:txBody>
-      </p:sp>
-      <p:sp>
-        <p:nvSpPr>
-          <p:cNvPr id="31" name="직사각형 30">
-            <a:extLst>
-              <a:ext uri="{FF2B5EF4-FFF2-40B4-BE49-F238E27FC236}">
-                <a16:creationId xmlns:a16="http://schemas.microsoft.com/office/drawing/2014/main" id="{F7DE6DD9-D6E8-F746-107B-80BDC22E1DE4}"/>
-              </a:ext>
-            </a:extLst>
-          </p:cNvPr>
-          <p:cNvSpPr/>
-          <p:nvPr/>
-        </p:nvSpPr>
-        <p:spPr>
-          <a:xfrm>
-            <a:off x="3214212" y="1504950"/>
-            <a:ext cx="889000" cy="539750"/>
-          </a:xfrm>
-          <a:prstGeom prst="rect">
-            <a:avLst/>
-          </a:prstGeom>
-        </p:spPr>
-        <p:style>
-          <a:lnRef idx="2">
-            <a:schemeClr val="accent1">
-              <a:shade val="15000"/>
-            </a:schemeClr>
-          </a:lnRef>
-          <a:fillRef idx="1">
-            <a:schemeClr val="accent1"/>
-          </a:fillRef>
-          <a:effectRef idx="0">
-            <a:schemeClr val="accent1"/>
-          </a:effectRef>
-          <a:fontRef idx="minor">
-            <a:schemeClr val="lt1"/>
-          </a:fontRef>
-        </p:style>
-        <p:txBody>
-          <a:bodyPr rtlCol="0" anchor="ctr"/>
-          <a:lstStyle/>
-          <a:p>
-            <a:pPr algn="ctr"/>
-            <a:r>
-              <a:rPr lang="en-US" altLang="ko-KR" sz="1200" dirty="0"/>
-              <a:t>Action</a:t>
-            </a:r>
-          </a:p>
-          <a:p>
-            <a:pPr algn="ctr"/>
-            <a:r>
-              <a:rPr lang="ko-KR" altLang="en-US" sz="1200" dirty="0"/>
-              <a:t>입력해제</a:t>
-            </a:r>
-            <a:endParaRPr lang="en-US" altLang="ko-KR" sz="1200" dirty="0"/>
-          </a:p>
-        </p:txBody>
-      </p:sp>
       <p:cxnSp>
         <p:nvCxnSpPr>
-          <p:cNvPr id="33" name="직선 연결선 32">
-            <a:extLst>
-              <a:ext uri="{FF2B5EF4-FFF2-40B4-BE49-F238E27FC236}">
-                <a16:creationId xmlns:a16="http://schemas.microsoft.com/office/drawing/2014/main" id="{C2921003-1467-388C-8AAD-F943C97F429A}"/>
+          <p:cNvPr id="49" name="직선 연결선 48">
+            <a:extLst>
+              <a:ext uri="{FF2B5EF4-FFF2-40B4-BE49-F238E27FC236}">
+                <a16:creationId xmlns:a16="http://schemas.microsoft.com/office/drawing/2014/main" id="{50A386A8-FC42-24D8-8103-5D119511E980}"/>
               </a:ext>
             </a:extLst>
           </p:cNvPr>
           <p:cNvCxnSpPr>
-            <a:stCxn id="27" idx="2"/>
-            <a:endCxn id="29" idx="0"/>
+            <a:cxnSpLocks/>
+            <a:stCxn id="134" idx="0"/>
+            <a:endCxn id="119" idx="2"/>
           </p:cNvCxnSpPr>
           <p:nvPr/>
         </p:nvCxnSpPr>
         <p:spPr>
-          <a:xfrm flipH="1">
-            <a:off x="2432246" y="616720"/>
-            <a:ext cx="3126867" cy="97693"/>
-          </a:xfrm>
-          <a:prstGeom prst="line">
-            <a:avLst/>
-          </a:prstGeom>
-          <a:ln>
-            <a:solidFill>
-              <a:schemeClr val="tx1"/>
-            </a:solidFill>
-          </a:ln>
-        </p:spPr>
-        <p:style>
-          <a:lnRef idx="2">
-            <a:schemeClr val="accent1"/>
-          </a:lnRef>
-          <a:fillRef idx="0">
-            <a:schemeClr val="accent1"/>
-          </a:fillRef>
-          <a:effectRef idx="1">
-            <a:schemeClr val="accent1"/>
-          </a:effectRef>
-          <a:fontRef idx="minor">
-            <a:schemeClr val="tx1"/>
-          </a:fontRef>
-        </p:style>
-      </p:cxnSp>
-      <p:cxnSp>
-        <p:nvCxnSpPr>
-          <p:cNvPr id="35" name="직선 연결선 34">
-            <a:extLst>
-              <a:ext uri="{FF2B5EF4-FFF2-40B4-BE49-F238E27FC236}">
-                <a16:creationId xmlns:a16="http://schemas.microsoft.com/office/drawing/2014/main" id="{0DE3FE1B-EE5E-679B-C785-97E83A51984A}"/>
-              </a:ext>
-            </a:extLst>
-          </p:cNvPr>
-          <p:cNvCxnSpPr>
-            <a:cxnSpLocks/>
-            <a:stCxn id="28" idx="0"/>
-            <a:endCxn id="29" idx="2"/>
-          </p:cNvCxnSpPr>
-          <p:nvPr/>
-        </p:nvCxnSpPr>
-        <p:spPr>
           <a:xfrm flipV="1">
-            <a:off x="892044" y="1254163"/>
-            <a:ext cx="1540202" cy="294418"/>
-          </a:xfrm>
-          <a:prstGeom prst="line">
-            <a:avLst/>
-          </a:prstGeom>
-          <a:ln>
-            <a:solidFill>
-              <a:schemeClr val="tx1"/>
-            </a:solidFill>
-          </a:ln>
-        </p:spPr>
-        <p:style>
-          <a:lnRef idx="2">
-            <a:schemeClr val="accent1"/>
-          </a:lnRef>
-          <a:fillRef idx="0">
-            <a:schemeClr val="accent1"/>
-          </a:fillRef>
-          <a:effectRef idx="1">
-            <a:schemeClr val="accent1"/>
-          </a:effectRef>
-          <a:fontRef idx="minor">
-            <a:schemeClr val="tx1"/>
-          </a:fontRef>
-        </p:style>
-      </p:cxnSp>
-      <p:cxnSp>
-        <p:nvCxnSpPr>
-          <p:cNvPr id="38" name="직선 연결선 37">
-            <a:extLst>
-              <a:ext uri="{FF2B5EF4-FFF2-40B4-BE49-F238E27FC236}">
-                <a16:creationId xmlns:a16="http://schemas.microsoft.com/office/drawing/2014/main" id="{21B82E47-F146-BCC1-EA48-0D00FD0D049F}"/>
-              </a:ext>
-            </a:extLst>
-          </p:cNvPr>
-          <p:cNvCxnSpPr>
-            <a:cxnSpLocks/>
-            <a:stCxn id="30" idx="0"/>
-            <a:endCxn id="29" idx="2"/>
-          </p:cNvCxnSpPr>
-          <p:nvPr/>
-        </p:nvCxnSpPr>
-        <p:spPr>
-          <a:xfrm flipV="1">
-            <a:off x="2344328" y="1254163"/>
-            <a:ext cx="87918" cy="294419"/>
-          </a:xfrm>
-          <a:prstGeom prst="line">
-            <a:avLst/>
-          </a:prstGeom>
-          <a:ln>
-            <a:solidFill>
-              <a:schemeClr val="tx1"/>
-            </a:solidFill>
-          </a:ln>
-        </p:spPr>
-        <p:style>
-          <a:lnRef idx="2">
-            <a:schemeClr val="accent1"/>
-          </a:lnRef>
-          <a:fillRef idx="0">
-            <a:schemeClr val="accent1"/>
-          </a:fillRef>
-          <a:effectRef idx="1">
-            <a:schemeClr val="accent1"/>
-          </a:effectRef>
-          <a:fontRef idx="minor">
-            <a:schemeClr val="tx1"/>
-          </a:fontRef>
-        </p:style>
-      </p:cxnSp>
-      <p:cxnSp>
-        <p:nvCxnSpPr>
-          <p:cNvPr id="41" name="직선 연결선 40">
-            <a:extLst>
-              <a:ext uri="{FF2B5EF4-FFF2-40B4-BE49-F238E27FC236}">
-                <a16:creationId xmlns:a16="http://schemas.microsoft.com/office/drawing/2014/main" id="{C63FAA53-E43E-3CBB-4529-7CD8DF597D8A}"/>
-              </a:ext>
-            </a:extLst>
-          </p:cNvPr>
-          <p:cNvCxnSpPr>
-            <a:cxnSpLocks/>
-            <a:stCxn id="31" idx="0"/>
-            <a:endCxn id="29" idx="2"/>
-          </p:cNvCxnSpPr>
-          <p:nvPr/>
-        </p:nvCxnSpPr>
-        <p:spPr>
-          <a:xfrm flipH="1" flipV="1">
-            <a:off x="2432246" y="1254163"/>
-            <a:ext cx="1226466" cy="250787"/>
-          </a:xfrm>
-          <a:prstGeom prst="line">
-            <a:avLst/>
-          </a:prstGeom>
-          <a:ln>
-            <a:solidFill>
-              <a:schemeClr val="tx1"/>
-            </a:solidFill>
-          </a:ln>
-        </p:spPr>
-        <p:style>
-          <a:lnRef idx="2">
-            <a:schemeClr val="accent1"/>
-          </a:lnRef>
-          <a:fillRef idx="0">
-            <a:schemeClr val="accent1"/>
-          </a:fillRef>
-          <a:effectRef idx="1">
-            <a:schemeClr val="accent1"/>
-          </a:effectRef>
-          <a:fontRef idx="minor">
-            <a:schemeClr val="tx1"/>
-          </a:fontRef>
-        </p:style>
-      </p:cxnSp>
-      <p:cxnSp>
-        <p:nvCxnSpPr>
-          <p:cNvPr id="46" name="직선 연결선 45">
-            <a:extLst>
-              <a:ext uri="{FF2B5EF4-FFF2-40B4-BE49-F238E27FC236}">
-                <a16:creationId xmlns:a16="http://schemas.microsoft.com/office/drawing/2014/main" id="{BFD44BB8-9F1B-54A5-7736-C498A0B11CE8}"/>
-              </a:ext>
-            </a:extLst>
-          </p:cNvPr>
-          <p:cNvCxnSpPr>
-            <a:cxnSpLocks/>
-            <a:stCxn id="4" idx="0"/>
-            <a:endCxn id="27" idx="2"/>
-          </p:cNvCxnSpPr>
-          <p:nvPr/>
-        </p:nvCxnSpPr>
-        <p:spPr>
-          <a:xfrm flipH="1" flipV="1">
-            <a:off x="5559113" y="616720"/>
-            <a:ext cx="1" cy="888230"/>
-          </a:xfrm>
-          <a:prstGeom prst="line">
-            <a:avLst/>
-          </a:prstGeom>
-          <a:ln>
-            <a:solidFill>
-              <a:schemeClr val="tx1"/>
-            </a:solidFill>
-          </a:ln>
-        </p:spPr>
-        <p:style>
-          <a:lnRef idx="2">
-            <a:schemeClr val="accent1"/>
-          </a:lnRef>
-          <a:fillRef idx="0">
-            <a:schemeClr val="accent1"/>
-          </a:fillRef>
-          <a:effectRef idx="1">
-            <a:schemeClr val="accent1"/>
-          </a:effectRef>
-          <a:fontRef idx="minor">
-            <a:schemeClr val="tx1"/>
-          </a:fontRef>
-        </p:style>
-      </p:cxnSp>
-      <p:cxnSp>
-        <p:nvCxnSpPr>
-          <p:cNvPr id="49" name="직선 연결선 48">
-            <a:extLst>
-              <a:ext uri="{FF2B5EF4-FFF2-40B4-BE49-F238E27FC236}">
-                <a16:creationId xmlns:a16="http://schemas.microsoft.com/office/drawing/2014/main" id="{50A386A8-FC42-24D8-8103-5D119511E980}"/>
-              </a:ext>
-            </a:extLst>
-          </p:cNvPr>
-          <p:cNvCxnSpPr>
-            <a:cxnSpLocks/>
-            <a:stCxn id="7" idx="0"/>
-            <a:endCxn id="4" idx="2"/>
-          </p:cNvCxnSpPr>
-          <p:nvPr/>
-        </p:nvCxnSpPr>
-        <p:spPr>
-          <a:xfrm flipV="1">
-            <a:off x="2590996" y="1924494"/>
-            <a:ext cx="2968118" cy="381970"/>
+            <a:off x="1147517" y="502607"/>
+            <a:ext cx="5041425" cy="271939"/>
           </a:xfrm>
           <a:prstGeom prst="line">
             <a:avLst/>
@@ -5132,7 +4615,7 @@
         </p:nvCxnSpPr>
         <p:spPr>
           <a:xfrm flipH="1">
-            <a:off x="1502135" y="2846214"/>
+            <a:off x="1394185" y="2827164"/>
             <a:ext cx="1088861" cy="156426"/>
           </a:xfrm>
           <a:prstGeom prst="line">
@@ -5177,7 +4660,7 @@
         </p:nvCxnSpPr>
         <p:spPr>
           <a:xfrm flipH="1" flipV="1">
-            <a:off x="2590996" y="2846214"/>
+            <a:off x="2483046" y="2827164"/>
             <a:ext cx="1067717" cy="156426"/>
           </a:xfrm>
           <a:prstGeom prst="line">
@@ -5222,7 +4705,7 @@
         </p:nvCxnSpPr>
         <p:spPr>
           <a:xfrm flipH="1">
-            <a:off x="2570375" y="3582460"/>
+            <a:off x="2462425" y="3563410"/>
             <a:ext cx="1088338" cy="462909"/>
           </a:xfrm>
           <a:prstGeom prst="line">
@@ -5267,7 +4750,7 @@
         </p:nvCxnSpPr>
         <p:spPr>
           <a:xfrm>
-            <a:off x="3658713" y="3582460"/>
+            <a:off x="3550763" y="3563410"/>
             <a:ext cx="847987" cy="406587"/>
           </a:xfrm>
           <a:prstGeom prst="line">
@@ -5312,7 +4795,7 @@
         </p:nvCxnSpPr>
         <p:spPr>
           <a:xfrm flipH="1">
-            <a:off x="1562296" y="4417183"/>
+            <a:off x="1454346" y="4398133"/>
             <a:ext cx="1008079" cy="462909"/>
           </a:xfrm>
           <a:prstGeom prst="line">
@@ -5357,8 +4840,8 @@
         </p:nvCxnSpPr>
         <p:spPr>
           <a:xfrm flipH="1" flipV="1">
-            <a:off x="5559114" y="1924494"/>
-            <a:ext cx="3441846" cy="367858"/>
+            <a:off x="6238564" y="1882407"/>
+            <a:ext cx="2654446" cy="390895"/>
           </a:xfrm>
           <a:prstGeom prst="line">
             <a:avLst/>
@@ -5402,7 +4885,7 @@
         </p:nvCxnSpPr>
         <p:spPr>
           <a:xfrm flipH="1">
-            <a:off x="7018260" y="2780248"/>
+            <a:off x="6910310" y="2761198"/>
             <a:ext cx="1982700" cy="268353"/>
           </a:xfrm>
           <a:prstGeom prst="line">
@@ -5447,7 +4930,7 @@
         </p:nvCxnSpPr>
         <p:spPr>
           <a:xfrm flipH="1" flipV="1">
-            <a:off x="9000960" y="2780248"/>
+            <a:off x="8893010" y="2761198"/>
             <a:ext cx="1634651" cy="326276"/>
           </a:xfrm>
           <a:prstGeom prst="line">
@@ -5492,7 +4975,7 @@
         </p:nvCxnSpPr>
         <p:spPr>
           <a:xfrm flipV="1">
-            <a:off x="6096000" y="3536497"/>
+            <a:off x="5988050" y="3517447"/>
             <a:ext cx="922260" cy="404869"/>
           </a:xfrm>
           <a:prstGeom prst="line">
@@ -5537,7 +5020,7 @@
         </p:nvCxnSpPr>
         <p:spPr>
           <a:xfrm flipH="1">
-            <a:off x="9815433" y="3594420"/>
+            <a:off x="9707483" y="3575370"/>
             <a:ext cx="820178" cy="326275"/>
           </a:xfrm>
           <a:prstGeom prst="line">
@@ -5582,7 +5065,7 @@
         </p:nvCxnSpPr>
         <p:spPr>
           <a:xfrm flipH="1" flipV="1">
-            <a:off x="7018260" y="3536497"/>
+            <a:off x="6910310" y="3517447"/>
             <a:ext cx="843956" cy="412039"/>
           </a:xfrm>
           <a:prstGeom prst="line">
@@ -5627,7 +5110,7 @@
         </p:nvCxnSpPr>
         <p:spPr>
           <a:xfrm flipH="1" flipV="1">
-            <a:off x="10635611" y="3594420"/>
+            <a:off x="10527661" y="3575370"/>
             <a:ext cx="856907" cy="360451"/>
           </a:xfrm>
           <a:prstGeom prst="line">
@@ -5672,7 +5155,7 @@
         </p:nvCxnSpPr>
         <p:spPr>
           <a:xfrm flipH="1" flipV="1">
-            <a:off x="2570375" y="4417183"/>
+            <a:off x="2462425" y="4398133"/>
             <a:ext cx="639255" cy="606980"/>
           </a:xfrm>
           <a:prstGeom prst="line">
@@ -5717,7 +5200,7 @@
         </p:nvCxnSpPr>
         <p:spPr>
           <a:xfrm flipV="1">
-            <a:off x="7093318" y="4575495"/>
+            <a:off x="6985368" y="4556445"/>
             <a:ext cx="768898" cy="535899"/>
           </a:xfrm>
           <a:prstGeom prst="line">
@@ -5762,7 +5245,7 @@
         </p:nvCxnSpPr>
         <p:spPr>
           <a:xfrm flipH="1" flipV="1">
-            <a:off x="7862216" y="4575495"/>
+            <a:off x="7754266" y="4556445"/>
             <a:ext cx="623215" cy="545009"/>
           </a:xfrm>
           <a:prstGeom prst="line">
@@ -5807,7 +5290,7 @@
         </p:nvCxnSpPr>
         <p:spPr>
           <a:xfrm flipV="1">
-            <a:off x="9196369" y="4408591"/>
+            <a:off x="9088419" y="4389541"/>
             <a:ext cx="619064" cy="115901"/>
           </a:xfrm>
           <a:prstGeom prst="line">
@@ -5852,7 +5335,7 @@
         </p:nvCxnSpPr>
         <p:spPr>
           <a:xfrm>
-            <a:off x="9815433" y="4408591"/>
+            <a:off x="9707483" y="4389541"/>
             <a:ext cx="712490" cy="236107"/>
           </a:xfrm>
           <a:prstGeom prst="line">
@@ -5897,8 +5380,613 @@
         </p:nvCxnSpPr>
         <p:spPr>
           <a:xfrm flipH="1">
-            <a:off x="6225769" y="5483208"/>
+            <a:off x="6117819" y="5464158"/>
             <a:ext cx="867549" cy="394893"/>
+          </a:xfrm>
+          <a:prstGeom prst="line">
+            <a:avLst/>
+          </a:prstGeom>
+          <a:ln>
+            <a:solidFill>
+              <a:schemeClr val="tx1"/>
+            </a:solidFill>
+          </a:ln>
+        </p:spPr>
+        <p:style>
+          <a:lnRef idx="2">
+            <a:schemeClr val="accent1"/>
+          </a:lnRef>
+          <a:fillRef idx="0">
+            <a:schemeClr val="accent1"/>
+          </a:fillRef>
+          <a:effectRef idx="1">
+            <a:schemeClr val="accent1"/>
+          </a:effectRef>
+          <a:fontRef idx="minor">
+            <a:schemeClr val="tx1"/>
+          </a:fontRef>
+        </p:style>
+      </p:cxnSp>
+      <p:cxnSp>
+        <p:nvCxnSpPr>
+          <p:cNvPr id="114" name="직선 연결선 113">
+            <a:extLst>
+              <a:ext uri="{FF2B5EF4-FFF2-40B4-BE49-F238E27FC236}">
+                <a16:creationId xmlns:a16="http://schemas.microsoft.com/office/drawing/2014/main" id="{4916E4F1-AC91-6A9D-549E-000AFB81145C}"/>
+              </a:ext>
+            </a:extLst>
+          </p:cNvPr>
+          <p:cNvCxnSpPr>
+            <a:cxnSpLocks/>
+            <a:stCxn id="20" idx="0"/>
+            <a:endCxn id="21" idx="2"/>
+          </p:cNvCxnSpPr>
+          <p:nvPr/>
+        </p:nvCxnSpPr>
+        <p:spPr>
+          <a:xfrm flipH="1" flipV="1">
+            <a:off x="6985368" y="5464158"/>
+            <a:ext cx="516673" cy="583629"/>
+          </a:xfrm>
+          <a:prstGeom prst="line">
+            <a:avLst/>
+          </a:prstGeom>
+          <a:ln>
+            <a:solidFill>
+              <a:schemeClr val="tx1"/>
+            </a:solidFill>
+          </a:ln>
+        </p:spPr>
+        <p:style>
+          <a:lnRef idx="2">
+            <a:schemeClr val="accent1"/>
+          </a:lnRef>
+          <a:fillRef idx="0">
+            <a:schemeClr val="accent1"/>
+          </a:fillRef>
+          <a:effectRef idx="1">
+            <a:schemeClr val="accent1"/>
+          </a:effectRef>
+          <a:fontRef idx="minor">
+            <a:schemeClr val="tx1"/>
+          </a:fontRef>
+        </p:style>
+      </p:cxnSp>
+      <p:sp>
+        <p:nvSpPr>
+          <p:cNvPr id="119" name="직사각형 118">
+            <a:extLst>
+              <a:ext uri="{FF2B5EF4-FFF2-40B4-BE49-F238E27FC236}">
+                <a16:creationId xmlns:a16="http://schemas.microsoft.com/office/drawing/2014/main" id="{F5BCB58C-F91B-BECD-CAF3-19127EB7332F}"/>
+              </a:ext>
+            </a:extLst>
+          </p:cNvPr>
+          <p:cNvSpPr/>
+          <p:nvPr/>
+        </p:nvSpPr>
+        <p:spPr>
+          <a:xfrm>
+            <a:off x="5652056" y="83063"/>
+            <a:ext cx="1073772" cy="419544"/>
+          </a:xfrm>
+          <a:prstGeom prst="rect">
+            <a:avLst/>
+          </a:prstGeom>
+        </p:spPr>
+        <p:style>
+          <a:lnRef idx="2">
+            <a:schemeClr val="accent1">
+              <a:shade val="15000"/>
+            </a:schemeClr>
+          </a:lnRef>
+          <a:fillRef idx="1">
+            <a:schemeClr val="accent1"/>
+          </a:fillRef>
+          <a:effectRef idx="0">
+            <a:schemeClr val="accent1"/>
+          </a:effectRef>
+          <a:fontRef idx="minor">
+            <a:schemeClr val="lt1"/>
+          </a:fontRef>
+        </p:style>
+        <p:txBody>
+          <a:bodyPr rtlCol="0" anchor="ctr"/>
+          <a:lstStyle/>
+          <a:p>
+            <a:pPr algn="ctr"/>
+            <a:r>
+              <a:rPr lang="en-US" altLang="ko-KR" sz="1200" dirty="0"/>
+              <a:t>Selector</a:t>
+            </a:r>
+          </a:p>
+          <a:p>
+            <a:pPr algn="ctr"/>
+            <a:r>
+              <a:rPr lang="ko-KR" altLang="en-US" sz="1200" dirty="0"/>
+              <a:t>대기 </a:t>
+            </a:r>
+            <a:r>
+              <a:rPr lang="en-US" altLang="ko-KR" sz="1200" dirty="0"/>
+              <a:t>or </a:t>
+            </a:r>
+            <a:r>
+              <a:rPr lang="ko-KR" altLang="en-US" sz="1200" dirty="0"/>
+              <a:t>행동</a:t>
+            </a:r>
+          </a:p>
+        </p:txBody>
+      </p:sp>
+      <p:sp>
+        <p:nvSpPr>
+          <p:cNvPr id="128" name="직사각형 127">
+            <a:extLst>
+              <a:ext uri="{FF2B5EF4-FFF2-40B4-BE49-F238E27FC236}">
+                <a16:creationId xmlns:a16="http://schemas.microsoft.com/office/drawing/2014/main" id="{2440130D-B643-1C4C-7A5C-6DCD65343A73}"/>
+              </a:ext>
+            </a:extLst>
+          </p:cNvPr>
+          <p:cNvSpPr/>
+          <p:nvPr/>
+        </p:nvSpPr>
+        <p:spPr>
+          <a:xfrm>
+            <a:off x="3438721" y="757518"/>
+            <a:ext cx="889000" cy="413945"/>
+          </a:xfrm>
+          <a:prstGeom prst="rect">
+            <a:avLst/>
+          </a:prstGeom>
+        </p:spPr>
+        <p:style>
+          <a:lnRef idx="2">
+            <a:schemeClr val="accent1">
+              <a:shade val="15000"/>
+            </a:schemeClr>
+          </a:lnRef>
+          <a:fillRef idx="1">
+            <a:schemeClr val="accent1"/>
+          </a:fillRef>
+          <a:effectRef idx="0">
+            <a:schemeClr val="accent1"/>
+          </a:effectRef>
+          <a:fontRef idx="minor">
+            <a:schemeClr val="lt1"/>
+          </a:fontRef>
+        </p:style>
+        <p:txBody>
+          <a:bodyPr rtlCol="0" anchor="ctr"/>
+          <a:lstStyle/>
+          <a:p>
+            <a:pPr algn="ctr"/>
+            <a:r>
+              <a:rPr lang="en-US" altLang="ko-KR" sz="1200" dirty="0"/>
+              <a:t>Sequence</a:t>
+            </a:r>
+          </a:p>
+          <a:p>
+            <a:pPr algn="ctr"/>
+            <a:r>
+              <a:rPr lang="ko-KR" altLang="en-US" sz="1200" dirty="0"/>
+              <a:t>대기 설정</a:t>
+            </a:r>
+            <a:endParaRPr lang="en-US" altLang="ko-KR" sz="1200" dirty="0"/>
+          </a:p>
+        </p:txBody>
+      </p:sp>
+      <p:sp>
+        <p:nvSpPr>
+          <p:cNvPr id="130" name="순서도: 판단 129">
+            <a:extLst>
+              <a:ext uri="{FF2B5EF4-FFF2-40B4-BE49-F238E27FC236}">
+                <a16:creationId xmlns:a16="http://schemas.microsoft.com/office/drawing/2014/main" id="{0FC9300C-2077-858F-C273-F919872EFD96}"/>
+              </a:ext>
+            </a:extLst>
+          </p:cNvPr>
+          <p:cNvSpPr/>
+          <p:nvPr/>
+        </p:nvSpPr>
+        <p:spPr>
+          <a:xfrm>
+            <a:off x="2690190" y="1467191"/>
+            <a:ext cx="919768" cy="523571"/>
+          </a:xfrm>
+          <a:prstGeom prst="flowChartDecision">
+            <a:avLst/>
+          </a:prstGeom>
+        </p:spPr>
+        <p:style>
+          <a:lnRef idx="2">
+            <a:schemeClr val="accent1">
+              <a:shade val="15000"/>
+            </a:schemeClr>
+          </a:lnRef>
+          <a:fillRef idx="1">
+            <a:schemeClr val="accent1"/>
+          </a:fillRef>
+          <a:effectRef idx="0">
+            <a:schemeClr val="accent1"/>
+          </a:effectRef>
+          <a:fontRef idx="minor">
+            <a:schemeClr val="lt1"/>
+          </a:fontRef>
+        </p:style>
+        <p:txBody>
+          <a:bodyPr rtlCol="0" anchor="ctr"/>
+          <a:lstStyle/>
+          <a:p>
+            <a:pPr algn="ctr"/>
+            <a:r>
+              <a:rPr lang="en-US" altLang="ko-KR" sz="1000" dirty="0"/>
+              <a:t>70%</a:t>
+            </a:r>
+            <a:endParaRPr lang="ko-KR" altLang="en-US" sz="1000" dirty="0"/>
+          </a:p>
+        </p:txBody>
+      </p:sp>
+      <p:sp>
+        <p:nvSpPr>
+          <p:cNvPr id="132" name="직사각형 131">
+            <a:extLst>
+              <a:ext uri="{FF2B5EF4-FFF2-40B4-BE49-F238E27FC236}">
+                <a16:creationId xmlns:a16="http://schemas.microsoft.com/office/drawing/2014/main" id="{D4626E5F-3DF2-E744-28E1-01532A25B340}"/>
+              </a:ext>
+            </a:extLst>
+          </p:cNvPr>
+          <p:cNvSpPr/>
+          <p:nvPr/>
+        </p:nvSpPr>
+        <p:spPr>
+          <a:xfrm>
+            <a:off x="3817102" y="1528930"/>
+            <a:ext cx="1031057" cy="419544"/>
+          </a:xfrm>
+          <a:prstGeom prst="rect">
+            <a:avLst/>
+          </a:prstGeom>
+        </p:spPr>
+        <p:style>
+          <a:lnRef idx="2">
+            <a:schemeClr val="accent1">
+              <a:shade val="15000"/>
+            </a:schemeClr>
+          </a:lnRef>
+          <a:fillRef idx="1">
+            <a:schemeClr val="accent1"/>
+          </a:fillRef>
+          <a:effectRef idx="0">
+            <a:schemeClr val="accent1"/>
+          </a:effectRef>
+          <a:fontRef idx="minor">
+            <a:schemeClr val="lt1"/>
+          </a:fontRef>
+        </p:style>
+        <p:txBody>
+          <a:bodyPr rtlCol="0" anchor="ctr"/>
+          <a:lstStyle/>
+          <a:p>
+            <a:pPr algn="ctr"/>
+            <a:r>
+              <a:rPr lang="en-US" altLang="ko-KR" sz="1200" dirty="0"/>
+              <a:t>Action</a:t>
+            </a:r>
+          </a:p>
+          <a:p>
+            <a:pPr algn="ctr"/>
+            <a:r>
+              <a:rPr lang="ko-KR" altLang="en-US" sz="1200" dirty="0"/>
+              <a:t>입력 해제</a:t>
+            </a:r>
+            <a:endParaRPr lang="en-US" altLang="ko-KR" sz="1200" dirty="0"/>
+          </a:p>
+        </p:txBody>
+      </p:sp>
+      <p:sp>
+        <p:nvSpPr>
+          <p:cNvPr id="133" name="순서도: 판단 132">
+            <a:extLst>
+              <a:ext uri="{FF2B5EF4-FFF2-40B4-BE49-F238E27FC236}">
+                <a16:creationId xmlns:a16="http://schemas.microsoft.com/office/drawing/2014/main" id="{569629D0-09EC-86D6-DF3C-96AF93B01944}"/>
+              </a:ext>
+            </a:extLst>
+          </p:cNvPr>
+          <p:cNvSpPr/>
+          <p:nvPr/>
+        </p:nvSpPr>
+        <p:spPr>
+          <a:xfrm>
+            <a:off x="278901" y="1569240"/>
+            <a:ext cx="1737232" cy="523571"/>
+          </a:xfrm>
+          <a:prstGeom prst="flowChartDecision">
+            <a:avLst/>
+          </a:prstGeom>
+        </p:spPr>
+        <p:style>
+          <a:lnRef idx="2">
+            <a:schemeClr val="accent1">
+              <a:shade val="15000"/>
+            </a:schemeClr>
+          </a:lnRef>
+          <a:fillRef idx="1">
+            <a:schemeClr val="accent1"/>
+          </a:fillRef>
+          <a:effectRef idx="0">
+            <a:schemeClr val="accent1"/>
+          </a:effectRef>
+          <a:fontRef idx="minor">
+            <a:schemeClr val="lt1"/>
+          </a:fontRef>
+        </p:style>
+        <p:txBody>
+          <a:bodyPr rtlCol="0" anchor="ctr"/>
+          <a:lstStyle/>
+          <a:p>
+            <a:pPr algn="ctr"/>
+            <a:r>
+              <a:rPr lang="ko-KR" altLang="en-US" sz="1000"/>
+              <a:t>대기 시간이 끝났는가</a:t>
+            </a:r>
+            <a:endParaRPr lang="ko-KR" altLang="en-US" sz="1000" dirty="0"/>
+          </a:p>
+        </p:txBody>
+      </p:sp>
+      <p:sp>
+        <p:nvSpPr>
+          <p:cNvPr id="134" name="직사각형 133">
+            <a:extLst>
+              <a:ext uri="{FF2B5EF4-FFF2-40B4-BE49-F238E27FC236}">
+                <a16:creationId xmlns:a16="http://schemas.microsoft.com/office/drawing/2014/main" id="{F59C3BD1-CE0C-5E9C-D89F-E63C611B3CB2}"/>
+              </a:ext>
+            </a:extLst>
+          </p:cNvPr>
+          <p:cNvSpPr/>
+          <p:nvPr/>
+        </p:nvSpPr>
+        <p:spPr>
+          <a:xfrm>
+            <a:off x="703017" y="774546"/>
+            <a:ext cx="889000" cy="413945"/>
+          </a:xfrm>
+          <a:prstGeom prst="rect">
+            <a:avLst/>
+          </a:prstGeom>
+        </p:spPr>
+        <p:style>
+          <a:lnRef idx="2">
+            <a:schemeClr val="accent1">
+              <a:shade val="15000"/>
+            </a:schemeClr>
+          </a:lnRef>
+          <a:fillRef idx="1">
+            <a:schemeClr val="accent1"/>
+          </a:fillRef>
+          <a:effectRef idx="0">
+            <a:schemeClr val="accent1"/>
+          </a:effectRef>
+          <a:fontRef idx="minor">
+            <a:schemeClr val="lt1"/>
+          </a:fontRef>
+        </p:style>
+        <p:txBody>
+          <a:bodyPr rtlCol="0" anchor="ctr"/>
+          <a:lstStyle/>
+          <a:p>
+            <a:pPr algn="ctr"/>
+            <a:r>
+              <a:rPr lang="en-US" altLang="ko-KR" sz="1200" dirty="0"/>
+              <a:t>Sequence</a:t>
+            </a:r>
+          </a:p>
+          <a:p>
+            <a:pPr algn="ctr"/>
+            <a:r>
+              <a:rPr lang="ko-KR" altLang="en-US" sz="1200" dirty="0"/>
+              <a:t>대기</a:t>
+            </a:r>
+            <a:endParaRPr lang="en-US" altLang="ko-KR" sz="1200" dirty="0"/>
+          </a:p>
+        </p:txBody>
+      </p:sp>
+      <p:cxnSp>
+        <p:nvCxnSpPr>
+          <p:cNvPr id="137" name="직선 연결선 136">
+            <a:extLst>
+              <a:ext uri="{FF2B5EF4-FFF2-40B4-BE49-F238E27FC236}">
+                <a16:creationId xmlns:a16="http://schemas.microsoft.com/office/drawing/2014/main" id="{9E2CF3EC-9ADD-D81B-5DDA-B85E6D8470CE}"/>
+              </a:ext>
+            </a:extLst>
+          </p:cNvPr>
+          <p:cNvCxnSpPr>
+            <a:cxnSpLocks/>
+            <a:stCxn id="128" idx="0"/>
+            <a:endCxn id="119" idx="2"/>
+          </p:cNvCxnSpPr>
+          <p:nvPr/>
+        </p:nvCxnSpPr>
+        <p:spPr>
+          <a:xfrm flipV="1">
+            <a:off x="3883221" y="502607"/>
+            <a:ext cx="2305721" cy="254911"/>
+          </a:xfrm>
+          <a:prstGeom prst="line">
+            <a:avLst/>
+          </a:prstGeom>
+          <a:ln>
+            <a:solidFill>
+              <a:schemeClr val="tx1"/>
+            </a:solidFill>
+          </a:ln>
+        </p:spPr>
+        <p:style>
+          <a:lnRef idx="2">
+            <a:schemeClr val="accent1"/>
+          </a:lnRef>
+          <a:fillRef idx="0">
+            <a:schemeClr val="accent1"/>
+          </a:fillRef>
+          <a:effectRef idx="1">
+            <a:schemeClr val="accent1"/>
+          </a:effectRef>
+          <a:fontRef idx="minor">
+            <a:schemeClr val="tx1"/>
+          </a:fontRef>
+        </p:style>
+      </p:cxnSp>
+      <p:cxnSp>
+        <p:nvCxnSpPr>
+          <p:cNvPr id="140" name="직선 연결선 139">
+            <a:extLst>
+              <a:ext uri="{FF2B5EF4-FFF2-40B4-BE49-F238E27FC236}">
+                <a16:creationId xmlns:a16="http://schemas.microsoft.com/office/drawing/2014/main" id="{572B2B78-2900-1DA9-5360-57DDC0E663DB}"/>
+              </a:ext>
+            </a:extLst>
+          </p:cNvPr>
+          <p:cNvCxnSpPr>
+            <a:cxnSpLocks/>
+            <a:stCxn id="4" idx="0"/>
+            <a:endCxn id="119" idx="2"/>
+          </p:cNvCxnSpPr>
+          <p:nvPr/>
+        </p:nvCxnSpPr>
+        <p:spPr>
+          <a:xfrm flipH="1" flipV="1">
+            <a:off x="6188942" y="502607"/>
+            <a:ext cx="49622" cy="960256"/>
+          </a:xfrm>
+          <a:prstGeom prst="line">
+            <a:avLst/>
+          </a:prstGeom>
+          <a:ln>
+            <a:solidFill>
+              <a:schemeClr val="tx1"/>
+            </a:solidFill>
+          </a:ln>
+        </p:spPr>
+        <p:style>
+          <a:lnRef idx="2">
+            <a:schemeClr val="accent1"/>
+          </a:lnRef>
+          <a:fillRef idx="0">
+            <a:schemeClr val="accent1"/>
+          </a:fillRef>
+          <a:effectRef idx="1">
+            <a:schemeClr val="accent1"/>
+          </a:effectRef>
+          <a:fontRef idx="minor">
+            <a:schemeClr val="tx1"/>
+          </a:fontRef>
+        </p:style>
+      </p:cxnSp>
+      <p:cxnSp>
+        <p:nvCxnSpPr>
+          <p:cNvPr id="143" name="직선 연결선 142">
+            <a:extLst>
+              <a:ext uri="{FF2B5EF4-FFF2-40B4-BE49-F238E27FC236}">
+                <a16:creationId xmlns:a16="http://schemas.microsoft.com/office/drawing/2014/main" id="{796E65A3-3DEE-D4E8-8E0A-5846A30DB0C3}"/>
+              </a:ext>
+            </a:extLst>
+          </p:cNvPr>
+          <p:cNvCxnSpPr>
+            <a:cxnSpLocks/>
+            <a:stCxn id="133" idx="0"/>
+            <a:endCxn id="134" idx="2"/>
+          </p:cNvCxnSpPr>
+          <p:nvPr/>
+        </p:nvCxnSpPr>
+        <p:spPr>
+          <a:xfrm flipV="1">
+            <a:off x="1147517" y="1188491"/>
+            <a:ext cx="0" cy="380749"/>
+          </a:xfrm>
+          <a:prstGeom prst="line">
+            <a:avLst/>
+          </a:prstGeom>
+          <a:ln>
+            <a:solidFill>
+              <a:schemeClr val="tx1"/>
+            </a:solidFill>
+          </a:ln>
+        </p:spPr>
+        <p:style>
+          <a:lnRef idx="2">
+            <a:schemeClr val="accent1"/>
+          </a:lnRef>
+          <a:fillRef idx="0">
+            <a:schemeClr val="accent1"/>
+          </a:fillRef>
+          <a:effectRef idx="1">
+            <a:schemeClr val="accent1"/>
+          </a:effectRef>
+          <a:fontRef idx="minor">
+            <a:schemeClr val="tx1"/>
+          </a:fontRef>
+        </p:style>
+      </p:cxnSp>
+      <p:cxnSp>
+        <p:nvCxnSpPr>
+          <p:cNvPr id="146" name="직선 연결선 145">
+            <a:extLst>
+              <a:ext uri="{FF2B5EF4-FFF2-40B4-BE49-F238E27FC236}">
+                <a16:creationId xmlns:a16="http://schemas.microsoft.com/office/drawing/2014/main" id="{65E5E2E9-2961-2688-EFAC-5822C4CE784D}"/>
+              </a:ext>
+            </a:extLst>
+          </p:cNvPr>
+          <p:cNvCxnSpPr>
+            <a:cxnSpLocks/>
+            <a:stCxn id="130" idx="0"/>
+            <a:endCxn id="128" idx="2"/>
+          </p:cNvCxnSpPr>
+          <p:nvPr/>
+        </p:nvCxnSpPr>
+        <p:spPr>
+          <a:xfrm flipV="1">
+            <a:off x="3150074" y="1171463"/>
+            <a:ext cx="733147" cy="295728"/>
+          </a:xfrm>
+          <a:prstGeom prst="line">
+            <a:avLst/>
+          </a:prstGeom>
+          <a:ln>
+            <a:solidFill>
+              <a:schemeClr val="tx1"/>
+            </a:solidFill>
+          </a:ln>
+        </p:spPr>
+        <p:style>
+          <a:lnRef idx="2">
+            <a:schemeClr val="accent1"/>
+          </a:lnRef>
+          <a:fillRef idx="0">
+            <a:schemeClr val="accent1"/>
+          </a:fillRef>
+          <a:effectRef idx="1">
+            <a:schemeClr val="accent1"/>
+          </a:effectRef>
+          <a:fontRef idx="minor">
+            <a:schemeClr val="tx1"/>
+          </a:fontRef>
+        </p:style>
+      </p:cxnSp>
+      <p:cxnSp>
+        <p:nvCxnSpPr>
+          <p:cNvPr id="149" name="직선 연결선 148">
+            <a:extLst>
+              <a:ext uri="{FF2B5EF4-FFF2-40B4-BE49-F238E27FC236}">
+                <a16:creationId xmlns:a16="http://schemas.microsoft.com/office/drawing/2014/main" id="{AD773191-3C78-5E25-65E0-59C665C7A1EE}"/>
+              </a:ext>
+            </a:extLst>
+          </p:cNvPr>
+          <p:cNvCxnSpPr>
+            <a:cxnSpLocks/>
+            <a:stCxn id="128" idx="2"/>
+            <a:endCxn id="132" idx="0"/>
+          </p:cNvCxnSpPr>
+          <p:nvPr/>
+        </p:nvCxnSpPr>
+        <p:spPr>
+          <a:xfrm>
+            <a:off x="3883221" y="1171463"/>
+            <a:ext cx="449410" cy="357467"/>
           </a:xfrm>
           <a:prstGeom prst="line">
             <a:avLst/>
